--- a/docs/lab-network-architecter.pptx
+++ b/docs/lab-network-architecter.pptx
@@ -596,7 +596,7 @@
           <a:lstStyle/>
           <a:p>
             <a:r>
-              <a:t>- spine と leaf は全組み合わせを結ぶ。spine 側の口は ethernet-1/&lt;leaf の番号&gt;、leaf 側の口は ethernet-1/&lt;spine の番号&gt;。</a:t>
+              <a:t>- spine と leaf は全組み合わせを結ぶ。spine 側のポートは ethernet-1/&lt;leaf の番号&gt;、leaf 側のポートは ethernet-1/&lt;spine の番号&gt;。</a:t>
             </a:r>
           </a:p>
           <a:p>
@@ -756,7 +756,7 @@
           </a:p>
           <a:p>
             <a:r>
-              <a:t>- まだ TRex のパケットは運べない。運ぶ土台ができただけ。</a:t>
+              <a:t>- この段階ではまだ TRex のパケットは運べない。運ぶための土台ができただけ。</a:t>
             </a:r>
           </a:p>
         </p:txBody>
@@ -901,17 +901,17 @@
           <a:lstStyle/>
           <a:p>
             <a:r>
-              <a:t>- spine は 2 台どちらを通っても同じ距離なので、leaf がパケットごとに振り分ける。1 本切れればもう一方だけになる。</a:t>
-            </a:r>
-          </a:p>
-          <a:p>
-            <a:r>
-              <a:t>- 相手の MAC をまだ知らないとき（ARP）は LAN 全体宛てなので、leaf は同じ LAN 番号を持つ全 leaf に封筒を 1 通ずつ送る（ingress replication）。</a:t>
-            </a:r>
-          </a:p>
-          <a:p>
-            <a:r>
-              <a:t>- port 0 ↔ port 1 は s-leaf-01 と s-leaf-02 のあいだで同じ動きをする。</a:t>
+              <a:t>- spine は 2 台どちらを通っても同じ長さなので、leaf がパケットの組ごとに振り分ける（ECMP）。1 本切れればもう一方だけになる。</a:t>
+            </a:r>
+          </a:p>
+          <a:p>
+            <a:r>
+              <a:t>- 相手の MAC アドレスをまだ知らないとき（ARP）は LAN 全体宛てなので、leaf は同じ LAN 番号を持つ全 leaf に封筒を 1 通ずつ送る（ingress replication）。</a:t>
+            </a:r>
+          </a:p>
+          <a:p>
+            <a:r>
+              <a:t>- port 0 ↔ port 1 は s-leaf-01 と s-leaf-02 の間で同じ動きをする。</a:t>
             </a:r>
           </a:p>
         </p:txBody>
@@ -4201,7 +4201,7 @@
                 <a:ea typeface="Noto Sans JP"/>
                 <a:cs typeface="Noto Sans JP"/>
               </a:rPr>
-              <a:t>はじめての人向け。スイッチ 6 台と TRex 1 台で、離れた 2 本のケーブルを同じ LAN に見せる 3 つの仕掛け</a:t>
+              <a:t>はじめての人向け。スイッチ 6 台と TRex 1 台で、離れた 2 台のスイッチにつないだケーブルを同じ LAN に見せる 3 つの仕組み</a:t>
             </a:r>
           </a:p>
         </p:txBody>
@@ -4348,7 +4348,7 @@
                 <a:ea typeface="Noto Sans JP"/>
                 <a:cs typeface="Noto Sans JP"/>
               </a:rPr>
-              <a:t>LAN の中は MAC で届き、LAN をまたぐと IP で届く</a:t>
+              <a:t>言葉 3: LAN の中は MAC アドレスで届き、LAN をまたぐと IP アドレスで届きます</a:t>
             </a:r>
           </a:p>
         </p:txBody>
@@ -4397,7 +4397,7 @@
         <p:spPr>
           <a:xfrm>
             <a:off x="841248" y="1755648"/>
-            <a:ext cx="5003140" cy="393700"/>
+            <a:ext cx="5003140" cy="354330"/>
           </a:xfrm>
           <a:prstGeom prst="rect">
             <a:avLst/>
@@ -4416,7 +4416,7 @@
               </a:lnSpc>
             </a:pPr>
             <a:r>
-              <a:rPr sz="2000" b="1" i="0">
+              <a:rPr sz="1800" b="1" i="0">
                 <a:solidFill>
                   <a:srgbClr val="111110"/>
                 </a:solidFill>
@@ -4437,8 +4437,8 @@
         </p:nvSpPr>
         <p:spPr>
           <a:xfrm>
-            <a:off x="841248" y="2387092"/>
-            <a:ext cx="5003140" cy="2303780"/>
+            <a:off x="841248" y="2347722"/>
+            <a:ext cx="5003140" cy="2427732"/>
           </a:xfrm>
           <a:prstGeom prst="rect">
             <a:avLst/>
@@ -4456,11 +4456,11 @@
                 <a:spcPct val="155000"/>
               </a:lnSpc>
               <a:spcAft>
-                <a:spcPts val="880"/>
+                <a:spcPts val="792"/>
               </a:spcAft>
             </a:pPr>
             <a:r>
-              <a:rPr sz="2000" b="0" i="0">
+              <a:rPr sz="1800" b="0" i="0">
                 <a:solidFill>
                   <a:srgbClr val="D63A2F"/>
                 </a:solidFill>
@@ -4471,7 +4471,7 @@
               <a:t>・</a:t>
             </a:r>
             <a:r>
-              <a:rPr sz="2000" b="0" i="0">
+              <a:rPr sz="1800" b="0" i="0">
                 <a:solidFill>
                   <a:srgbClr val="1A1A1A"/>
                 </a:solidFill>
@@ -4479,7 +4479,7 @@
                 <a:ea typeface="Noto Sans JP"/>
                 <a:cs typeface="Noto Sans JP"/>
               </a:rPr>
-              <a:t>送る側は「この IP の MAC は何?」と LAN 全体に聞く（ARP）</a:t>
+              <a:t>送る側は「この IP の MAC アドレスは何か」と LAN 全体に聞く（ARP）</a:t>
             </a:r>
           </a:p>
           <a:p>
@@ -4488,11 +4488,11 @@
                 <a:spcPct val="155000"/>
               </a:lnSpc>
               <a:spcAft>
-                <a:spcPts val="880"/>
+                <a:spcPts val="792"/>
               </a:spcAft>
             </a:pPr>
             <a:r>
-              <a:rPr sz="2000" b="0" i="0">
+              <a:rPr sz="1800" b="0" i="0">
                 <a:solidFill>
                   <a:srgbClr val="D63A2F"/>
                 </a:solidFill>
@@ -4503,7 +4503,7 @@
               <a:t>・</a:t>
             </a:r>
             <a:r>
-              <a:rPr sz="2000" b="0" i="0">
+              <a:rPr sz="1800" b="0" i="0">
                 <a:solidFill>
                   <a:srgbClr val="1A1A1A"/>
                 </a:solidFill>
@@ -4511,7 +4511,7 @@
                 <a:ea typeface="Noto Sans JP"/>
                 <a:cs typeface="Noto Sans JP"/>
               </a:rPr>
-              <a:t>返事の MAC を宛先に書いて送る</a:t>
+              <a:t>返ってきた MAC アドレスを宛先にして送る</a:t>
             </a:r>
           </a:p>
           <a:p>
@@ -4520,11 +4520,11 @@
                 <a:spcPct val="155000"/>
               </a:lnSpc>
               <a:spcAft>
-                <a:spcPts val="880"/>
+                <a:spcPts val="792"/>
               </a:spcAft>
             </a:pPr>
             <a:r>
-              <a:rPr sz="2000" b="0" i="0">
+              <a:rPr sz="1800" b="0" i="0">
                 <a:solidFill>
                   <a:srgbClr val="D63A2F"/>
                 </a:solidFill>
@@ -4535,7 +4535,7 @@
               <a:t>・</a:t>
             </a:r>
             <a:r>
-              <a:rPr sz="2000" b="0" i="0">
+              <a:rPr sz="1800" b="0" i="0">
                 <a:solidFill>
                   <a:srgbClr val="1A1A1A"/>
                 </a:solidFill>
@@ -4543,7 +4543,7 @@
                 <a:ea typeface="Noto Sans JP"/>
                 <a:cs typeface="Noto Sans JP"/>
               </a:rPr>
-              <a:t>スイッチが MAC 表を見てその口へ出す</a:t>
+              <a:t>スイッチが MAC アドレステーブルを見て送り出す</a:t>
             </a:r>
           </a:p>
         </p:txBody>
@@ -4557,7 +4557,7 @@
         <p:spPr>
           <a:xfrm>
             <a:off x="6347308" y="1755648"/>
-            <a:ext cx="5003140" cy="393700"/>
+            <a:ext cx="5003140" cy="354330"/>
           </a:xfrm>
           <a:prstGeom prst="rect">
             <a:avLst/>
@@ -4576,7 +4576,7 @@
               </a:lnSpc>
             </a:pPr>
             <a:r>
-              <a:rPr sz="2000" b="1" i="0">
+              <a:rPr sz="1800" b="1" i="0">
                 <a:solidFill>
                   <a:srgbClr val="111110"/>
                 </a:solidFill>
@@ -4597,8 +4597,8 @@
         </p:nvSpPr>
         <p:spPr>
           <a:xfrm>
-            <a:off x="6347308" y="2387092"/>
-            <a:ext cx="5003140" cy="1404620"/>
+            <a:off x="6347308" y="2347722"/>
+            <a:ext cx="5003140" cy="1264158"/>
           </a:xfrm>
           <a:prstGeom prst="rect">
             <a:avLst/>
@@ -4616,11 +4616,11 @@
                 <a:spcPct val="155000"/>
               </a:lnSpc>
               <a:spcAft>
-                <a:spcPts val="880"/>
+                <a:spcPts val="792"/>
               </a:spcAft>
             </a:pPr>
             <a:r>
-              <a:rPr sz="2000" b="0" i="0">
+              <a:rPr sz="1800" b="0" i="0">
                 <a:solidFill>
                   <a:srgbClr val="D63A2F"/>
                 </a:solidFill>
@@ -4631,7 +4631,7 @@
               <a:t>・</a:t>
             </a:r>
             <a:r>
-              <a:rPr sz="2000" b="0" i="0">
+              <a:rPr sz="1800" b="0" i="0">
                 <a:solidFill>
                   <a:srgbClr val="1A1A1A"/>
                 </a:solidFill>
@@ -4639,7 +4639,7 @@
                 <a:ea typeface="Noto Sans JP"/>
                 <a:cs typeface="Noto Sans JP"/>
               </a:rPr>
-              <a:t>ルータが宛先 IP を見て、道順表（ルーティングテーブル）に従って次へ渡す</a:t>
+              <a:t>ルーターが宛先 IP を見て、経路表に従って次へ渡す</a:t>
             </a:r>
           </a:p>
           <a:p>
@@ -4648,11 +4648,11 @@
                 <a:spcPct val="155000"/>
               </a:lnSpc>
               <a:spcAft>
-                <a:spcPts val="880"/>
+                <a:spcPts val="792"/>
               </a:spcAft>
             </a:pPr>
             <a:r>
-              <a:rPr sz="2000" b="0" i="0">
+              <a:rPr sz="1800" b="0" i="0">
                 <a:solidFill>
                   <a:srgbClr val="D63A2F"/>
                 </a:solidFill>
@@ -4663,7 +4663,7 @@
               <a:t>・</a:t>
             </a:r>
             <a:r>
-              <a:rPr sz="2000" b="0" i="0">
+              <a:rPr sz="1800" b="0" i="0">
                 <a:solidFill>
                   <a:srgbClr val="1A1A1A"/>
                 </a:solidFill>
@@ -4671,7 +4671,7 @@
                 <a:ea typeface="Noto Sans JP"/>
                 <a:cs typeface="Noto Sans JP"/>
               </a:rPr>
-              <a:t>MAC は 1 区間ごとに書き換わる</a:t>
+              <a:t>MAC アドレスは区間ごとに書き換わる</a:t>
             </a:r>
           </a:p>
         </p:txBody>
@@ -4684,8 +4684,8 @@
         </p:nvSpPr>
         <p:spPr>
           <a:xfrm>
-            <a:off x="841248" y="4928616"/>
-            <a:ext cx="10509199" cy="787400"/>
+            <a:off x="841248" y="5013198"/>
+            <a:ext cx="10509199" cy="708660"/>
           </a:xfrm>
           <a:prstGeom prst="rect">
             <a:avLst/>
@@ -4704,7 +4704,7 @@
               </a:lnSpc>
             </a:pPr>
             <a:r>
-              <a:rPr sz="2000" b="0" i="0">
+              <a:rPr sz="1800" b="0" i="0">
                 <a:solidFill>
                   <a:srgbClr val="1A1A1A"/>
                 </a:solidFill>
@@ -4712,7 +4712,7 @@
                 <a:ea typeface="Noto Sans JP"/>
                 <a:cs typeface="Noto Sans JP"/>
               </a:rPr>
-              <a:t>この lab では、スイッチ同士のあいだは IP で運ぶ。そのままでは leaf 1 に挿した口と leaf 2 に挿した口は同じ LAN にならない。</a:t>
+              <a:t>この lab のスイッチ同士は IP で運ぶので、そのままでは leaf 1 と leaf 2 のポートは同じ LAN になりません。</a:t>
             </a:r>
           </a:p>
         </p:txBody>
@@ -4937,7 +4937,7 @@
                 <a:ea typeface="Noto Sans JP"/>
                 <a:cs typeface="Noto Sans JP"/>
               </a:rPr>
-              <a:t>leaf 1 に挿したケーブルと leaf 2 に挿したケーブルを、同じ LAN に見せたい。</a:t>
+              <a:t>leaf 1 につないだケーブルと leaf 2 につないだケーブルを、同じ LAN に見せたい。</a:t>
             </a:r>
           </a:p>
         </p:txBody>
@@ -5085,7 +5085,7 @@
                 <a:ea typeface="Noto Sans JP"/>
                 <a:cs typeface="Noto Sans JP"/>
               </a:rPr>
-              <a:t>間は IP で運ぶので、3 つの仕掛けが要る</a:t>
+              <a:t>間は IP で運ぶので、3 つの仕組みが要ります</a:t>
             </a:r>
           </a:p>
         </p:txBody>
@@ -5175,7 +5175,7 @@
                 <a:ea typeface="Noto Sans JP"/>
                 <a:cs typeface="Noto Sans JP"/>
               </a:rPr>
-              <a:t>間にあるのは IP で運ぶスイッチ。MAC では届かない</a:t>
+              <a:t>間にあるのは IP で運ぶスイッチ。MAC アドレスだけでは届かない</a:t>
             </a:r>
           </a:p>
           <a:p>
@@ -5207,7 +5207,7 @@
                 <a:ea typeface="Noto Sans JP"/>
                 <a:cs typeface="Noto Sans JP"/>
               </a:rPr>
-              <a:t>仕掛け 1: 道を教え合う（IS-IS）</a:t>
+              <a:t>仕組み 1: 経路を交換する（IS-IS）</a:t>
             </a:r>
           </a:p>
           <a:p>
@@ -5239,7 +5239,7 @@
                 <a:ea typeface="Noto Sans JP"/>
                 <a:cs typeface="Noto Sans JP"/>
               </a:rPr>
-              <a:t>仕掛け 2: 誰がどこにいるか共有する（BGP EVPN）</a:t>
+              <a:t>仕組み 2: どの MAC アドレスがどこにいるかを共有する（BGP EVPN）</a:t>
             </a:r>
           </a:p>
           <a:p>
@@ -5271,7 +5271,7 @@
                 <a:ea typeface="Noto Sans JP"/>
                 <a:cs typeface="Noto Sans JP"/>
               </a:rPr>
-              <a:t>仕掛け 3: 封筒に入れて運ぶ（VXLAN）</a:t>
+              <a:t>仕組み 3: 封筒に入れて運ぶ（VXLAN）</a:t>
             </a:r>
           </a:p>
         </p:txBody>
@@ -5419,7 +5419,7 @@
                 <a:ea typeface="Noto Sans JP"/>
                 <a:cs typeface="Noto Sans JP"/>
               </a:rPr>
-              <a:t>仕掛け 1: IS-IS は、スイッチ同士が道順表を自動で教え合う</a:t>
+              <a:t>仕組み 1: IS-IS は、スイッチ同士が経路表を自動で作り合う仕組みです</a:t>
             </a:r>
           </a:p>
         </p:txBody>
@@ -5495,7 +5495,7 @@
                 <a:ea typeface="Noto Sans JP"/>
                 <a:cs typeface="Noto Sans JP"/>
               </a:rPr>
-              <a:t>スイッチ同士は IP で話すので「どのスイッチへはどの口から行けるか」の道順表が要る。人が手で書かず自動で教え合う仕組みが IS-IS。</a:t>
+              <a:t>スイッチ同士は IP で通信するので「どのスイッチへはどのポートから出るか」の経路表が要ります。人が書かずに自動で作る仕組みが IS-IS です。</a:t>
             </a:r>
           </a:p>
         </p:txBody>
@@ -5509,7 +5509,7 @@
         <p:spPr>
           <a:xfrm>
             <a:off x="841248" y="2623312"/>
-            <a:ext cx="10509199" cy="2966720"/>
+            <a:ext cx="10509199" cy="2336800"/>
           </a:xfrm>
           <a:prstGeom prst="rect">
             <a:avLst/>
@@ -5550,7 +5550,7 @@
                 <a:ea typeface="Noto Sans JP"/>
                 <a:cs typeface="Noto Sans JP"/>
               </a:rPr>
-              <a:t>名乗る: 各スイッチは「自分はこういう者で、隣にはこいつがいる」を隣へ送る。6 台が同じ情報を持つまで回す</a:t>
+              <a:t>隣に知らせる: 「自分は誰で、隣に誰がいるか」を隣へ送る。6 台が同じ情報を持つまで繰り返す</a:t>
             </a:r>
           </a:p>
           <a:p>
@@ -5582,7 +5582,7 @@
                 <a:ea typeface="Noto Sans JP"/>
                 <a:cs typeface="Noto Sans JP"/>
               </a:rPr>
-              <a:t>地図を描く: 集まった情報で全体の地図を作り、「どこへは最短でどの口か」を道順表に書く</a:t>
+              <a:t>地図を作る: 集まった情報で全体の地図を作り、「どこへは最短でどのポートか」を経路表に書く</a:t>
             </a:r>
           </a:p>
           <a:p>
@@ -5614,7 +5614,7 @@
                 <a:ea typeface="Noto Sans JP"/>
                 <a:cs typeface="Noto Sans JP"/>
               </a:rPr>
-              <a:t>線が切れたら: 隣へ伝え、全員が地図を描き直す。spine が 2 台あるのでもう一方を通る道に切り替わる</a:t>
+              <a:t>回線が切れたら: 全員が地図を作り直す。spine が 2 台あるので、もう一方を通る経路に切り替わる</a:t>
             </a:r>
           </a:p>
           <a:p>
@@ -5646,7 +5646,7 @@
                 <a:ea typeface="Noto Sans JP"/>
                 <a:cs typeface="Noto Sans JP"/>
               </a:rPr>
-              <a:t>教え合うのは主に「各スイッチ自身の住所」（ループバック）。口が 1 本切れても消えない</a:t>
+              <a:t>交換するのは主にスイッチ本体の IP アドレス（ループバック）。ポートが 1 本切れても消えない</a:t>
             </a:r>
           </a:p>
           <a:p>
@@ -5678,7 +5678,7 @@
                 <a:ea typeface="Noto Sans JP"/>
                 <a:cs typeface="Noto Sans JP"/>
               </a:rPr>
-              <a:t>これで leaf から他の leaf の本体へ IP で荷物を送れる。この土台を underlay（下の層）と呼ぶ</a:t>
+              <a:t>これで leaf からほかの leaf 本体へ IP で送れる。この土台の層を underlay と呼ぶ</a:t>
             </a:r>
           </a:p>
         </p:txBody>
@@ -5826,7 +5826,7 @@
                 <a:ea typeface="Noto Sans JP"/>
                 <a:cs typeface="Noto Sans JP"/>
               </a:rPr>
-              <a:t>仕掛け 2: BGP EVPN は、leaf 同士が「どの MAC がどの leaf の先か」を見せ合う</a:t>
+              <a:t>仕組み 2: BGP EVPN は、leaf 同士が「どの MAC アドレスがどこにいるか」を教え合う仕組みです</a:t>
             </a:r>
           </a:p>
         </p:txBody>
@@ -5902,7 +5902,7 @@
                 <a:ea typeface="Noto Sans JP"/>
                 <a:cs typeface="Noto Sans JP"/>
               </a:rPr>
-              <a:t>leaf は自分の TRex 側の口で見た MAC しか知らない。「その MAC は向こうの leaf の先にいる」と知るために MAC 表を見せ合う。</a:t>
+              <a:t>leaf は、自分の TRex 側のポートで見た MAC アドレスしか知りません。「その MAC アドレスは向こうの leaf の先にいる」と知るために、MAC アドレステーブルの中身を教え合います。</a:t>
             </a:r>
           </a:p>
         </p:txBody>
@@ -5916,7 +5916,7 @@
         <p:spPr>
           <a:xfrm>
             <a:off x="841248" y="2623312"/>
-            <a:ext cx="10509199" cy="2651760"/>
+            <a:ext cx="10509199" cy="2966720"/>
           </a:xfrm>
           <a:prstGeom prst="rect">
             <a:avLst/>
@@ -5957,7 +5957,7 @@
                 <a:ea typeface="Noto Sans JP"/>
                 <a:cs typeface="Noto Sans JP"/>
               </a:rPr>
-              <a:t>BGP: ルータ同士が「こういう宛先を知っている」と知らせ合う、インターネットでも使われる仕組み</a:t>
+              <a:t>BGP: ルーター同士が「こういう宛先を知っている」と知らせ合う仕組み。インターネットでも使われている</a:t>
             </a:r>
           </a:p>
           <a:p>
@@ -5989,7 +5989,7 @@
                 <a:ea typeface="Noto Sans JP"/>
                 <a:cs typeface="Noto Sans JP"/>
               </a:rPr>
-              <a:t>EVPN: その BGP に、IP の道順ではなく MAC の居場所を載せる使い方</a:t>
+              <a:t>EVPN: その BGP で、IP の経路ではなく MAC アドレスの居場所を知らせる使い方</a:t>
             </a:r>
           </a:p>
           <a:p>
@@ -6021,7 +6021,7 @@
                 <a:ea typeface="Noto Sans JP"/>
                 <a:cs typeface="Noto Sans JP"/>
               </a:rPr>
-              <a:t>載せる内容: 「MAC ◯◯ は私（leaf 10.255.2.1）の先にいる」。受け取った leaf は 10.255.2.1 へ送ればよいと分かる</a:t>
+              <a:t>知らせる内容: 「MAC アドレス ◯◯ は私（leaf 10.255.2.1）の先にいます」。受け取った leaf は 10.255.2.1 へ送ればよいと分かる</a:t>
             </a:r>
           </a:p>
           <a:p>
@@ -6053,7 +6053,7 @@
                 <a:ea typeface="Noto Sans JP"/>
                 <a:cs typeface="Noto Sans JP"/>
               </a:rPr>
-              <a:t>spine が掲示板: leaf は spine にだけ知らせ、spine が全 leaf に配り直す（ルートリフレクタ）。spine 2 台が同じ役</a:t>
+              <a:t>spine が取りまとめ役: leaf は spine にだけ知らせ、spine が全 leaf に配り直す（ルートリフレクタ）。spine 2 台が同じ役割</a:t>
             </a:r>
           </a:p>
           <a:p>
@@ -6085,7 +6085,7 @@
                 <a:ea typeface="Noto Sans JP"/>
                 <a:cs typeface="Noto Sans JP"/>
               </a:rPr>
-              <a:t>目印: 全員が番号 65100（AS 番号）を名乗り、見せ合う LAN に 100 という番号を付ける</a:t>
+              <a:t>目印の番号: 全員が同じ番号 65100（AS 番号）を名乗り、共有する LAN に 100 という番号を付ける</a:t>
             </a:r>
           </a:p>
         </p:txBody>
@@ -6233,7 +6233,7 @@
                 <a:ea typeface="Noto Sans JP"/>
                 <a:cs typeface="Noto Sans JP"/>
               </a:rPr>
-              <a:t>仕掛け 3: VXLAN は、leaf がパケットをまるごと IP の封筒に入れて運ぶ</a:t>
+              <a:t>仕組み 3: VXLAN は、leaf がパケットをまるごと IP の封筒に入れて運ぶ仕組みです</a:t>
             </a:r>
           </a:p>
         </p:txBody>
@@ -6309,7 +6309,7 @@
                 <a:ea typeface="Noto Sans JP"/>
                 <a:cs typeface="Noto Sans JP"/>
               </a:rPr>
-              <a:t>TRex のパケットは MAC 宛てなので、IP で運ぶ spine はそのままでは扱えない。leaf が封筒に入れ、宛先は仕掛け 2 で分かった向こうの leaf の住所にする。</a:t>
+              <a:t>TRex のパケットは MAC アドレス宛てなので、IP で運ぶ spine はそのままでは扱えません。leaf がパケットをまるごと IP の封筒に入れ（カプセル化）、宛先は仕組み 2 で分かった向こうの leaf のアドレスにします。</a:t>
             </a:r>
           </a:p>
         </p:txBody>
@@ -6324,7 +6324,7 @@
         </p:nvGraphicFramePr>
         <p:xfrm>
           <a:off x="841248" y="2465832"/>
-          <a:ext cx="10509199" cy="1798320"/>
+          <a:ext cx="10509199" cy="1867508"/>
         </p:xfrm>
         <a:graphic>
           <a:graphicData uri="http://schemas.openxmlformats.org/drawingml/2006/table">
@@ -6387,7 +6387,7 @@
                           <a:ea typeface="Noto Sans JP"/>
                           <a:cs typeface="Noto Sans JP"/>
                         </a:rPr>
-                        <a:t>中身</a:t>
+                        <a:t>書いてあること</a:t>
                       </a:r>
                     </a:p>
                   </a:txBody>
@@ -6615,7 +6615,7 @@
                           <a:ea typeface="Noto Sans JP"/>
                           <a:cs typeface="Noto Sans JP"/>
                         </a:rPr>
-                        <a:t>VXLAN と分かる番号</a:t>
+                        <a:t>VXLAN だと分かる番号</a:t>
                       </a:r>
                     </a:p>
                   </a:txBody>
@@ -6713,7 +6713,7 @@
                           <a:ea typeface="Noto Sans JP"/>
                           <a:cs typeface="Noto Sans JP"/>
                         </a:rPr>
-                        <a:t>どの LAN の荷物か</a:t>
+                        <a:t>どの LAN のパケットか</a:t>
                       </a:r>
                     </a:p>
                   </a:txBody>
@@ -6727,7 +6727,7 @@
                   </a:tcPr>
                 </a:tc>
               </a:tr>
-              <a:tr h="359664">
+              <a:tr h="428852">
                 <a:tc>
                   <a:txBody>
                     <a:bodyPr wrap="square"/>
@@ -6811,7 +6811,7 @@
                           <a:ea typeface="Noto Sans JP"/>
                           <a:cs typeface="Noto Sans JP"/>
                         </a:rPr>
-                        <a:t>TRex の元のパケット。MAC も含めてそのまま</a:t>
+                        <a:t>TRex の元のパケット。MAC アドレスも含めてそのまま</a:t>
                       </a:r>
                     </a:p>
                   </a:txBody>
@@ -6837,7 +6837,7 @@
         </p:nvSpPr>
         <p:spPr>
           <a:xfrm>
-            <a:off x="841248" y="4501896"/>
+            <a:off x="841248" y="4571084"/>
             <a:ext cx="10509199" cy="1213104"/>
           </a:xfrm>
           <a:prstGeom prst="rect">
@@ -6879,7 +6879,7 @@
                 <a:ea typeface="Noto Sans JP"/>
                 <a:cs typeface="Noto Sans JP"/>
               </a:rPr>
-              <a:t>包む側の leaf: 宛先 MAC がいる leaf の住所へ封筒で送る</a:t>
+              <a:t>包む側の leaf: 宛先の MAC アドレスがいる leaf のアドレスへ、封筒に入れて送る</a:t>
             </a:r>
           </a:p>
           <a:p>
@@ -6911,7 +6911,7 @@
                 <a:ea typeface="Noto Sans JP"/>
                 <a:cs typeface="Noto Sans JP"/>
               </a:rPr>
-              <a:t>途中の spine: 封筒の宛先 IP しか見ない。道順表どおり隣へ渡すだけ</a:t>
+              <a:t>途中の spine: 封筒の宛先 IP アドレスしか見ない。経路表どおりに隣へ渡すだけ</a:t>
             </a:r>
           </a:p>
           <a:p>
@@ -6943,7 +6943,7 @@
                 <a:ea typeface="Noto Sans JP"/>
                 <a:cs typeface="Noto Sans JP"/>
               </a:rPr>
-              <a:t>ほどく側の leaf: 封筒を開け、VNI 100 の荷物だと確かめて TRex の口へ出す</a:t>
+              <a:t>ほどく側の leaf: 封筒を開け、VNI 100 のパケットだと確かめて TRex 側のポートへ送り出す</a:t>
             </a:r>
           </a:p>
           <a:p>
@@ -6975,7 +6975,7 @@
                 <a:ea typeface="Noto Sans JP"/>
                 <a:cs typeface="Noto Sans JP"/>
               </a:rPr>
-              <a:t>この封筒の層を overlay（上の層）と呼ぶ</a:t>
+              <a:t>この封筒の層を overlay（オーバーレイ）と呼ぶ</a:t>
             </a:r>
           </a:p>
         </p:txBody>
@@ -7123,7 +7123,7 @@
                 <a:ea typeface="Noto Sans JP"/>
                 <a:cs typeface="Noto Sans JP"/>
               </a:rPr>
-              <a:t>1 つのパケットは、包む・運ぶ・ほどくの 5 歩で port 2 から port 3 に届く</a:t>
+              <a:t>1 つのパケットは、TRex → leaf → spine → leaf → TRex と 5 段階で届きます</a:t>
             </a:r>
           </a:p>
         </p:txBody>
@@ -7172,7 +7172,7 @@
         <p:spPr>
           <a:xfrm>
             <a:off x="841248" y="1755648"/>
-            <a:ext cx="10509199" cy="3691890"/>
+            <a:ext cx="10509199" cy="4046220"/>
           </a:xfrm>
           <a:prstGeom prst="rect">
             <a:avLst/>
@@ -7213,7 +7213,7 @@
                 <a:ea typeface="Noto Sans JP"/>
                 <a:cs typeface="Noto Sans JP"/>
               </a:rPr>
-              <a:t>1 TRex port 2: 宛先 10.100.0.14 の MAC 宛てに送る。普通の LAN と同じ動き</a:t>
+              <a:t>1 TRex が送る: port 2 から、宛先 MAC アドレスを port 3 のものにしたパケットを送る。普通の LAN と同じ動き</a:t>
             </a:r>
           </a:p>
           <a:p>
@@ -7245,7 +7245,7 @@
                 <a:ea typeface="Noto Sans JP"/>
                 <a:cs typeface="Noto Sans JP"/>
               </a:rPr>
-              <a:t>2 a-leaf-01 が包む: 「その MAC は 10.255.2.2 の先」と知っているので、封筒に入れて送る</a:t>
+              <a:t>2 a-leaf-01 が包む: 「その MAC アドレスは 10.255.2.2 の先」と知っているので、封筒に入れて送る</a:t>
             </a:r>
           </a:p>
           <a:p>
@@ -7277,7 +7277,7 @@
                 <a:ea typeface="Noto Sans JP"/>
                 <a:cs typeface="Noto Sans JP"/>
               </a:rPr>
-              <a:t>3 spine が運ぶ: 封筒の宛先 10.255.2.2 を道順表で引き、a-leaf-02 の口へ出す</a:t>
+              <a:t>3 spine が運ぶ: 封筒の宛先 10.255.2.2 を経路表で引き、a-leaf-02 へ渡す。封筒の中身は見ない</a:t>
             </a:r>
           </a:p>
           <a:p>
@@ -7309,7 +7309,7 @@
                 <a:ea typeface="Noto Sans JP"/>
                 <a:cs typeface="Noto Sans JP"/>
               </a:rPr>
-              <a:t>4 a-leaf-02 がほどく: 封筒を開け、中のパケットを ethernet-1/3 から出す</a:t>
+              <a:t>4 a-leaf-02 がほどく: 封筒を開け、中のパケットを ethernet-1/3 から送り出す</a:t>
             </a:r>
           </a:p>
           <a:p>
@@ -7341,7 +7341,7 @@
                 <a:ea typeface="Noto Sans JP"/>
                 <a:cs typeface="Noto Sans JP"/>
               </a:rPr>
-              <a:t>5 TRex port 3: 送られたときと同じ形で届く。間に 3 台いたことは分からない</a:t>
+              <a:t>5 TRex が受け取る: 送られたときと同じ形で port 3 に届く。間に 3 台いたことは分からない</a:t>
             </a:r>
           </a:p>
         </p:txBody>
@@ -7566,7 +7566,7 @@
                 <a:ea typeface="Noto Sans JP"/>
                 <a:cs typeface="Noto Sans JP"/>
               </a:rPr>
-              <a:t>スイッチが知らせる 3 つの口、SR-MPLS への差し替え、覚えること。</a:t>
+              <a:t>スイッチが起きたことを知らせる 3 つの経路、SR-MPLS への差し替え、覚えておくこと。</a:t>
             </a:r>
           </a:p>
         </p:txBody>
@@ -7714,7 +7714,7 @@
                 <a:ea typeface="Noto Sans JP"/>
                 <a:cs typeface="Noto Sans JP"/>
               </a:rPr>
-              <a:t>スイッチは、トラップ・ログ・購読の 3 つの口で起きたことを知らせる</a:t>
+              <a:t>6 台のスイッチで起きたことは、3 つの経路で lab の外へ送られます</a:t>
             </a:r>
           </a:p>
         </p:txBody>
@@ -7764,19 +7764,18 @@
         </p:nvGraphicFramePr>
         <p:xfrm>
           <a:off x="841248" y="1755648"/>
-          <a:ext cx="10509199" cy="2073044"/>
+          <a:ext cx="10509199" cy="2286456"/>
         </p:xfrm>
         <a:graphic>
           <a:graphicData uri="http://schemas.openxmlformats.org/drawingml/2006/table">
             <a:tbl>
               <a:tblPr firstRow="1" bandRow="0"/>
               <a:tblGrid>
-                <a:gridCol w="2627299"/>
-                <a:gridCol w="2627299"/>
-                <a:gridCol w="2627299"/>
-                <a:gridCol w="2627302"/>
+                <a:gridCol w="3503066"/>
+                <a:gridCol w="3503066"/>
+                <a:gridCol w="3503067"/>
               </a:tblGrid>
-              <a:tr h="449072">
+              <a:tr h="493776">
                 <a:tc>
                   <a:txBody>
                     <a:bodyPr wrap="square"/>
@@ -7788,7 +7787,7 @@
                         </a:lnSpc>
                       </a:pPr>
                       <a:r>
-                        <a:rPr sz="1312" b="1" i="0">
+                        <a:rPr sz="1476" b="1" i="0">
                           <a:solidFill>
                             <a:srgbClr val="111110"/>
                           </a:solidFill>
@@ -7796,7 +7795,7 @@
                           <a:ea typeface="Noto Sans JP"/>
                           <a:cs typeface="Noto Sans JP"/>
                         </a:rPr>
-                        <a:t>口の名前</a:t>
+                        <a:t>経路</a:t>
                       </a:r>
                     </a:p>
                   </a:txBody>
@@ -7820,7 +7819,7 @@
                         </a:lnSpc>
                       </a:pPr>
                       <a:r>
-                        <a:rPr sz="1312" b="1" i="0">
+                        <a:rPr sz="1476" b="1" i="0">
                           <a:solidFill>
                             <a:srgbClr val="111110"/>
                           </a:solidFill>
@@ -7828,7 +7827,7 @@
                           <a:ea typeface="Noto Sans JP"/>
                           <a:cs typeface="Noto Sans JP"/>
                         </a:rPr>
-                        <a:t>何を知らせるか</a:t>
+                        <a:t>送られるもの</a:t>
                       </a:r>
                     </a:p>
                   </a:txBody>
@@ -7852,7 +7851,7 @@
                         </a:lnSpc>
                       </a:pPr>
                       <a:r>
-                        <a:rPr sz="1312" b="1" i="0">
+                        <a:rPr sz="1476" b="1" i="0">
                           <a:solidFill>
                             <a:srgbClr val="111110"/>
                           </a:solidFill>
@@ -7860,39 +7859,7 @@
                           <a:ea typeface="Noto Sans JP"/>
                           <a:cs typeface="Noto Sans JP"/>
                         </a:rPr>
-                        <a:t>どう届くか</a:t>
-                      </a:r>
-                    </a:p>
-                  </a:txBody>
-                  <a:tcPr marL="91440" marR="91440" marT="45720" marB="45720" anchor="ctr">
-                    <a:lnB w="15240" cap="flat">
-                      <a:solidFill>
-                        <a:srgbClr val="111110"/>
-                      </a:solidFill>
-                    </a:lnB>
-                    <a:noFill/>
-                  </a:tcPr>
-                </a:tc>
-                <a:tc>
-                  <a:txBody>
-                    <a:bodyPr wrap="square"/>
-                    <a:lstStyle/>
-                    <a:p>
-                      <a:pPr>
-                        <a:lnSpc>
-                          <a:spcPct val="135000"/>
-                        </a:lnSpc>
-                      </a:pPr>
-                      <a:r>
-                        <a:rPr sz="1312" b="1" i="0">
-                          <a:solidFill>
-                            <a:srgbClr val="111110"/>
-                          </a:solidFill>
-                          <a:latin typeface="Lato"/>
-                          <a:ea typeface="Noto Sans JP"/>
-                          <a:cs typeface="Noto Sans JP"/>
-                        </a:rPr>
-                        <a:t>AWS 側で誰が受けるか</a:t>
+                        <a:t>受け取る側</a:t>
                       </a:r>
                     </a:p>
                   </a:txBody>
@@ -7906,7 +7873,7 @@
                   </a:tcPr>
                 </a:tc>
               </a:tr>
-              <a:tr h="541324">
+              <a:tr h="597560">
                 <a:tc>
                   <a:txBody>
                     <a:bodyPr wrap="square"/>
@@ -7918,7 +7885,7 @@
                         </a:lnSpc>
                       </a:pPr>
                       <a:r>
-                        <a:rPr sz="1312" b="0" i="0">
+                        <a:rPr sz="1476" b="0" i="0">
                           <a:solidFill>
                             <a:srgbClr val="1A1A1A"/>
                           </a:solidFill>
@@ -7950,7 +7917,7 @@
                         </a:lnSpc>
                       </a:pPr>
                       <a:r>
-                        <a:rPr sz="1312" b="0" i="0">
+                        <a:rPr sz="1476" b="0" i="0">
                           <a:solidFill>
                             <a:srgbClr val="1A1A1A"/>
                           </a:solidFill>
@@ -7958,7 +7925,7 @@
                           <a:ea typeface="Noto Sans JP"/>
                           <a:cs typeface="Noto Sans JP"/>
                         </a:rPr>
-                        <a:t>「口が落ちた」を起きた瞬間に短く通知</a:t>
+                        <a:t>「ポートが落ちた」などの出来事。起きた瞬間にスイッチが送る</a:t>
                       </a:r>
                     </a:p>
                   </a:txBody>
@@ -7982,7 +7949,7 @@
                         </a:lnSpc>
                       </a:pPr>
                       <a:r>
-                        <a:rPr sz="1312" b="0" i="0">
+                        <a:rPr sz="1476" b="0" i="0">
                           <a:solidFill>
                             <a:srgbClr val="1A1A1A"/>
                           </a:solidFill>
@@ -7990,39 +7957,7 @@
                           <a:ea typeface="Noto Sans JP"/>
                           <a:cs typeface="Noto Sans JP"/>
                         </a:rPr>
-                        <a:t>スイッチが自分から送る</a:t>
-                      </a:r>
-                    </a:p>
-                  </a:txBody>
-                  <a:tcPr marL="91440" marR="91440" marT="45720" marB="45720" anchor="ctr">
-                    <a:lnB w="9525" cap="flat">
-                      <a:solidFill>
-                        <a:srgbClr val="DFDFDF"/>
-                      </a:solidFill>
-                    </a:lnB>
-                    <a:noFill/>
-                  </a:tcPr>
-                </a:tc>
-                <a:tc>
-                  <a:txBody>
-                    <a:bodyPr wrap="square"/>
-                    <a:lstStyle/>
-                    <a:p>
-                      <a:pPr>
-                        <a:lnSpc>
-                          <a:spcPct val="135000"/>
-                        </a:lnSpc>
-                      </a:pPr>
-                      <a:r>
-                        <a:rPr sz="1312" b="0" i="0">
-                          <a:solidFill>
-                            <a:srgbClr val="1A1A1A"/>
-                          </a:solidFill>
-                          <a:latin typeface="Lato"/>
-                          <a:ea typeface="Noto Sans JP"/>
-                          <a:cs typeface="Noto Sans JP"/>
-                        </a:rPr>
-                        <a:t>Telegraf が貯め場へ</a:t>
+                        <a:t>Telegraf がキューへ</a:t>
                       </a:r>
                     </a:p>
                   </a:txBody>
@@ -8036,7 +7971,7 @@
                   </a:tcPr>
                 </a:tc>
               </a:tr>
-              <a:tr h="541324">
+              <a:tr h="597560">
                 <a:tc>
                   <a:txBody>
                     <a:bodyPr wrap="square"/>
@@ -8048,7 +7983,7 @@
                         </a:lnSpc>
                       </a:pPr>
                       <a:r>
-                        <a:rPr sz="1312" b="0" i="0">
+                        <a:rPr sz="1476" b="0" i="0">
                           <a:solidFill>
                             <a:srgbClr val="1A1A1A"/>
                           </a:solidFill>
@@ -8080,7 +8015,7 @@
                         </a:lnSpc>
                       </a:pPr>
                       <a:r>
-                        <a:rPr sz="1312" b="0" i="0">
+                        <a:rPr sz="1476" b="0" i="0">
                           <a:solidFill>
                             <a:srgbClr val="1A1A1A"/>
                           </a:solidFill>
@@ -8088,7 +8023,7 @@
                           <a:ea typeface="Noto Sans JP"/>
                           <a:cs typeface="Noto Sans JP"/>
                         </a:rPr>
-                        <a:t>人が読む文章のログ。理由つき</a:t>
+                        <a:t>スイッチのログ 1 行ずつ。これもスイッチが送る</a:t>
                       </a:r>
                     </a:p>
                   </a:txBody>
@@ -8112,7 +8047,7 @@
                         </a:lnSpc>
                       </a:pPr>
                       <a:r>
-                        <a:rPr sz="1312" b="0" i="0">
+                        <a:rPr sz="1476" b="0" i="0">
                           <a:solidFill>
                             <a:srgbClr val="1A1A1A"/>
                           </a:solidFill>
@@ -8120,39 +8055,7 @@
                           <a:ea typeface="Noto Sans JP"/>
                           <a:cs typeface="Noto Sans JP"/>
                         </a:rPr>
-                        <a:t>スイッチが自分から送る</a:t>
-                      </a:r>
-                    </a:p>
-                  </a:txBody>
-                  <a:tcPr marL="91440" marR="91440" marT="45720" marB="45720" anchor="ctr">
-                    <a:lnB w="9525" cap="flat">
-                      <a:solidFill>
-                        <a:srgbClr val="DFDFDF"/>
-                      </a:solidFill>
-                    </a:lnB>
-                    <a:noFill/>
-                  </a:tcPr>
-                </a:tc>
-                <a:tc>
-                  <a:txBody>
-                    <a:bodyPr wrap="square"/>
-                    <a:lstStyle/>
-                    <a:p>
-                      <a:pPr>
-                        <a:lnSpc>
-                          <a:spcPct val="135000"/>
-                        </a:lnSpc>
-                      </a:pPr>
-                      <a:r>
-                        <a:rPr sz="1312" b="0" i="0">
-                          <a:solidFill>
-                            <a:srgbClr val="1A1A1A"/>
-                          </a:solidFill>
-                          <a:latin typeface="Lato"/>
-                          <a:ea typeface="Noto Sans JP"/>
-                          <a:cs typeface="Noto Sans JP"/>
-                        </a:rPr>
-                        <a:t>syslog-ng が貯め場へ</a:t>
+                        <a:t>syslog-ng がキューへ</a:t>
                       </a:r>
                     </a:p>
                   </a:txBody>
@@ -8166,7 +8069,7 @@
                   </a:tcPr>
                 </a:tc>
               </a:tr>
-              <a:tr h="541324">
+              <a:tr h="597560">
                 <a:tc>
                   <a:txBody>
                     <a:bodyPr wrap="square"/>
@@ -8178,7 +8081,7 @@
                         </a:lnSpc>
                       </a:pPr>
                       <a:r>
-                        <a:rPr sz="1312" b="0" i="0">
+                        <a:rPr sz="1476" b="0" i="0">
                           <a:solidFill>
                             <a:srgbClr val="1A1A1A"/>
                           </a:solidFill>
@@ -8210,7 +8113,7 @@
                         </a:lnSpc>
                       </a:pPr>
                       <a:r>
-                        <a:rPr sz="1312" b="0" i="0">
+                        <a:rPr sz="1476" b="0" i="0">
                           <a:solidFill>
                             <a:srgbClr val="1A1A1A"/>
                           </a:solidFill>
@@ -8218,7 +8121,7 @@
                           <a:ea typeface="Noto Sans JP"/>
                           <a:cs typeface="Noto Sans JP"/>
                         </a:rPr>
-                        <a:t>口の状態、隣との状態、通信量の数字</a:t>
+                        <a:t>通信量や BGP の状態。外から定期的に取りに行く</a:t>
                       </a:r>
                     </a:p>
                   </a:txBody>
@@ -8242,7 +8145,7 @@
                         </a:lnSpc>
                       </a:pPr>
                       <a:r>
-                        <a:rPr sz="1312" b="0" i="0">
+                        <a:rPr sz="1476" b="0" i="0">
                           <a:solidFill>
                             <a:srgbClr val="1A1A1A"/>
                           </a:solidFill>
@@ -8250,39 +8153,7 @@
                           <a:ea typeface="Noto Sans JP"/>
                           <a:cs typeface="Noto Sans JP"/>
                         </a:rPr>
-                        <a:t>AWS 側から接続して購読する</a:t>
-                      </a:r>
-                    </a:p>
-                  </a:txBody>
-                  <a:tcPr marL="91440" marR="91440" marT="45720" marB="45720" anchor="ctr">
-                    <a:lnB w="9525" cap="flat">
-                      <a:solidFill>
-                        <a:srgbClr val="DFDFDF"/>
-                      </a:solidFill>
-                    </a:lnB>
-                    <a:noFill/>
-                  </a:tcPr>
-                </a:tc>
-                <a:tc>
-                  <a:txBody>
-                    <a:bodyPr wrap="square"/>
-                    <a:lstStyle/>
-                    <a:p>
-                      <a:pPr>
-                        <a:lnSpc>
-                          <a:spcPct val="135000"/>
-                        </a:lnSpc>
-                      </a:pPr>
-                      <a:r>
-                        <a:rPr sz="1312" b="0" i="0">
-                          <a:solidFill>
-                            <a:srgbClr val="1A1A1A"/>
-                          </a:solidFill>
-                          <a:latin typeface="Lato"/>
-                          <a:ea typeface="Noto Sans JP"/>
-                          <a:cs typeface="Noto Sans JP"/>
-                        </a:rPr>
-                        <a:t>gnmic が貯め場へ</a:t>
+                        <a:t>gnmic がキューへ</a:t>
                       </a:r>
                     </a:p>
                   </a:txBody>
@@ -8308,8 +8179,8 @@
         </p:nvSpPr>
         <p:spPr>
           <a:xfrm>
-            <a:off x="841248" y="4066436"/>
-            <a:ext cx="10509199" cy="1213104"/>
+            <a:off x="841248" y="4279848"/>
+            <a:ext cx="10509199" cy="1364742"/>
           </a:xfrm>
           <a:prstGeom prst="rect">
             <a:avLst/>
@@ -8327,11 +8198,11 @@
                 <a:spcPct val="155000"/>
               </a:lnSpc>
               <a:spcAft>
-                <a:spcPts val="704"/>
+                <a:spcPts val="792"/>
               </a:spcAft>
             </a:pPr>
             <a:r>
-              <a:rPr sz="1600" b="0" i="0">
+              <a:rPr sz="1800" b="0" i="0">
                 <a:solidFill>
                   <a:srgbClr val="D63A2F"/>
                 </a:solidFill>
@@ -8342,7 +8213,7 @@
               <a:t>・</a:t>
             </a:r>
             <a:r>
-              <a:rPr sz="1600" b="0" i="0">
+              <a:rPr sz="1800" b="0" i="0">
                 <a:solidFill>
                   <a:srgbClr val="1A1A1A"/>
                 </a:solidFill>
@@ -8350,7 +8221,7 @@
                 <a:ea typeface="Noto Sans JP"/>
                 <a:cs typeface="Noto Sans JP"/>
               </a:rPr>
-              <a:t>貯め場: 届いた通知を種類ごとの列に並べて順に貯める場所（AWS の MSK）</a:t>
+              <a:t>キュー: 届いたものを順にためて、読む側が自分のペースで取り出す場所（AWS の MSK）</a:t>
             </a:r>
           </a:p>
           <a:p>
@@ -8359,11 +8230,11 @@
                 <a:spcPct val="155000"/>
               </a:lnSpc>
               <a:spcAft>
-                <a:spcPts val="704"/>
+                <a:spcPts val="792"/>
               </a:spcAft>
             </a:pPr>
             <a:r>
-              <a:rPr sz="1600" b="0" i="0">
+              <a:rPr sz="1800" b="0" i="0">
                 <a:solidFill>
                   <a:srgbClr val="D63A2F"/>
                 </a:solidFill>
@@ -8374,7 +8245,7 @@
               <a:t>・</a:t>
             </a:r>
             <a:r>
-              <a:rPr sz="1600" b="0" i="0">
+              <a:rPr sz="1800" b="0" i="0">
                 <a:solidFill>
                   <a:srgbClr val="1A1A1A"/>
                 </a:solidFill>
@@ -8382,7 +8253,7 @@
                 <a:ea typeface="Noto Sans JP"/>
                 <a:cs typeface="Noto Sans JP"/>
               </a:rPr>
-              <a:t>そのあと: 貯め場から読んで整え、検索する場所・グラフにする場所・長く残す場所・アラートの仕組みへ配る</a:t>
+              <a:t>そのあと: キューから取り出して整え、検索・グラフ・保存・アラートの仕組みへ配る</a:t>
             </a:r>
           </a:p>
           <a:p>
@@ -8391,11 +8262,11 @@
                 <a:spcPct val="155000"/>
               </a:lnSpc>
               <a:spcAft>
-                <a:spcPts val="704"/>
+                <a:spcPts val="792"/>
               </a:spcAft>
             </a:pPr>
             <a:r>
-              <a:rPr sz="1600" b="0" i="0">
+              <a:rPr sz="1800" b="0" i="0">
                 <a:solidFill>
                   <a:srgbClr val="D63A2F"/>
                 </a:solidFill>
@@ -8406,7 +8277,7 @@
               <a:t>・</a:t>
             </a:r>
             <a:r>
-              <a:rPr sz="1600" b="0" i="0">
+              <a:rPr sz="1800" b="0" i="0">
                 <a:solidFill>
                   <a:srgbClr val="1A1A1A"/>
                 </a:solidFill>
@@ -8414,7 +8285,7 @@
                 <a:ea typeface="Noto Sans JP"/>
                 <a:cs typeface="Noto Sans JP"/>
               </a:rPr>
-              <a:t>スイッチは 1 つの決まった宛先に送るだけで、lab 側の機械が AWS 内の受け口へ転送する</a:t>
+              <a:t>スイッチは決まった宛先に送るだけで、lab の EC2 が AWS の受け口へ転送する</a:t>
             </a:r>
           </a:p>
         </p:txBody>
@@ -8562,7 +8433,7 @@
                 <a:ea typeface="Noto Sans JP"/>
                 <a:cs typeface="Noto Sans JP"/>
               </a:rPr>
-              <a:t>最初の依頼は SR-MPLS で、いまは封筒を VXLAN で代用している</a:t>
+              <a:t>依頼にあった SR-MPLS は、機種とライセンスの都合で VXLAN に置き換えています</a:t>
             </a:r>
           </a:p>
         </p:txBody>
@@ -8638,7 +8509,7 @@
                 <a:ea typeface="Noto Sans JP"/>
                 <a:cs typeface="Noto Sans JP"/>
               </a:rPr>
-              <a:t>2026-10-08 の依頼は「ISIS / SR-MPLS」だった。SR-MPLS は仕掛け 3 の封筒を別の種類にする話で、仕掛け 1 と 2 はそのまま使う。</a:t>
+              <a:t>2026-10-08 の依頼では「ISIS / SR-MPLS」の構成が挙がっていました。SR-MPLS は仕組み 3 の封筒を別の種類にする話で、仕組み 1 と 2 はそのまま使います。</a:t>
             </a:r>
           </a:p>
         </p:txBody>
@@ -8814,7 +8685,7 @@
                           <a:ea typeface="Noto Sans JP"/>
                           <a:cs typeface="Noto Sans JP"/>
                         </a:rPr>
-                        <a:t>IP（宛先は leaf の住所）</a:t>
+                        <a:t>IP（宛先は leaf のアドレス）</a:t>
                       </a:r>
                     </a:p>
                   </a:txBody>
@@ -8846,7 +8717,7 @@
                           <a:ea typeface="Noto Sans JP"/>
                           <a:cs typeface="Noto Sans JP"/>
                         </a:rPr>
-                        <a:t>短いラベル（宛先 leaf の番号）</a:t>
+                        <a:t>短い番号（ラベル）を先頭に貼る</a:t>
                       </a:r>
                     </a:p>
                   </a:txBody>
@@ -8912,7 +8783,7 @@
                           <a:ea typeface="Noto Sans JP"/>
                           <a:cs typeface="Noto Sans JP"/>
                         </a:rPr>
-                        <a:t>道順表を引く普通の IP ルータ</a:t>
+                        <a:t>経路表を引く普通の IP ルーター</a:t>
                       </a:r>
                     </a:p>
                   </a:txBody>
@@ -9110,7 +8981,7 @@
                 <a:ea typeface="Noto Sans JP"/>
                 <a:cs typeface="Noto Sans JP"/>
               </a:rPr>
-              <a:t>ライセンスが届くまで、同じ形で動かせる VXLAN で代用すると「lab を IS-IS と TRex で組む（011）」で決めた</a:t>
+              <a:t>手元に機種とライセンスがないので、まず VXLAN で全体を通すと「lab を IS-IS と TRex で組む（011）」で決めた</a:t>
             </a:r>
           </a:p>
           <a:p>
@@ -9142,7 +9013,7 @@
                 <a:ea typeface="Noto Sans JP"/>
                 <a:cs typeface="Noto Sans JP"/>
               </a:rPr>
-              <a:t>替えるときは lab の生成スクリプトで機種とライセンスを指定し直し、leaf の封筒の設定を替える</a:t>
+              <a:t>替えるときは、生成スクリプトで機種とライセンスを指定し直し、leaf の「封筒に入れる」設定を替える</a:t>
             </a:r>
           </a:p>
           <a:p>
@@ -9174,7 +9045,7 @@
                 <a:ea typeface="Noto Sans JP"/>
                 <a:cs typeface="Noto Sans JP"/>
               </a:rPr>
-              <a:t>スイッチの並び・ケーブル・IS-IS・BGP EVPN・TRex・監視の 3 つの口は変わらない</a:t>
+              <a:t>スイッチの並び・ケーブル・IS-IS・BGP EVPN・TRex・監視の 3 経路は変わらない</a:t>
             </a:r>
           </a:p>
         </p:txBody>
@@ -9399,7 +9270,7 @@
                 <a:ea typeface="Noto Sans JP"/>
                 <a:cs typeface="Noto Sans JP"/>
               </a:rPr>
-              <a:t>本物のスイッチ OS を 6 台動かし、パケットを撃ち、起きたことを AWS に集める。</a:t>
+              <a:t>本物のスイッチ OS を 6 台動かし、テスト用のパケットを流し、起きたことを AWS に集めます。</a:t>
             </a:r>
           </a:p>
         </p:txBody>
@@ -9547,7 +9418,7 @@
                 <a:ea typeface="Noto Sans JP"/>
                 <a:cs typeface="Noto Sans JP"/>
               </a:rPr>
-              <a:t>覚えることは 3 つ</a:t>
+              <a:t>覚えておくことは 3 つです</a:t>
             </a:r>
           </a:p>
         </p:txBody>
@@ -9596,7 +9467,7 @@
         <p:spPr>
           <a:xfrm>
             <a:off x="841248" y="1755648"/>
-            <a:ext cx="10509199" cy="2697480"/>
+            <a:ext cx="10509199" cy="3091180"/>
           </a:xfrm>
           <a:prstGeom prst="rect">
             <a:avLst/>
@@ -9637,7 +9508,7 @@
                 <a:ea typeface="Noto Sans JP"/>
                 <a:cs typeface="Noto Sans JP"/>
               </a:rPr>
-              <a:t>スイッチ同士は IP で話す。だから leaf 1 と leaf 2 の TRex の口は、そのままでは同じ LAN にならない</a:t>
+              <a:t>スイッチ同士は IP で運ぶ。だから leaf 1 と leaf 2 の TRex 側のポートは、そのままでは同じ LAN にならない</a:t>
             </a:r>
           </a:p>
           <a:p>
@@ -9669,7 +9540,7 @@
                 <a:ea typeface="Noto Sans JP"/>
                 <a:cs typeface="Noto Sans JP"/>
               </a:rPr>
-              <a:t>IS-IS で道を教え合い、BGP EVPN で「誰がどこにいるか」を共有し、VXLAN の封筒で運ぶ。leaf が包み、spine が運び、leaf がほどく</a:t>
+              <a:t>IS-IS で経路表を作り、BGP EVPN で MAC アドレスの居場所を教え合い、VXLAN の封筒で運ぶ。leaf が包み、spine が運び、leaf がほどく</a:t>
             </a:r>
           </a:p>
           <a:p>
@@ -9701,7 +9572,7 @@
                 <a:ea typeface="Noto Sans JP"/>
                 <a:cs typeface="Noto Sans JP"/>
               </a:rPr>
-              <a:t>SR-MPLS は封筒の種類が違うだけ。ライセンスが来たら封筒を替える。監視の 3 つの口はそのまま</a:t>
+              <a:t>SR-MPLS は封筒の種類が違うだけ。機種とライセンスがそろったら封筒を替える。監視の 3 経路はそのまま</a:t>
             </a:r>
           </a:p>
         </p:txBody>
@@ -9849,7 +9720,7 @@
                 <a:ea typeface="Noto Sans JP"/>
                 <a:cs typeface="Noto Sans JP"/>
               </a:rPr>
-              <a:t>この lab は、撃って、運んで、見る場所である</a:t>
+              <a:t>この lab は、パケットを流し、運び、起きたことを見る場所です</a:t>
             </a:r>
           </a:p>
         </p:txBody>
@@ -9925,7 +9796,7 @@
                 <a:ea typeface="Noto Sans JP"/>
                 <a:cs typeface="Noto Sans JP"/>
               </a:rPr>
-              <a:t>撃つ: TRex</a:t>
+              <a:t>流す: TRex</a:t>
             </a:r>
           </a:p>
         </p:txBody>
@@ -9980,7 +9851,7 @@
                 <a:ea typeface="Noto Sans JP"/>
                 <a:cs typeface="Noto Sans JP"/>
               </a:rPr>
-              <a:t>ネットワークに負荷をかける道具</a:t>
+              <a:t>ネットワークに負荷をかけるための装置</a:t>
             </a:r>
           </a:p>
           <a:p>
@@ -10012,7 +9883,7 @@
                 <a:ea typeface="Noto Sans JP"/>
                 <a:cs typeface="Noto Sans JP"/>
               </a:rPr>
-              <a:t>本番のサーバの代わりに大量のパケットを作って流す</a:t>
+              <a:t>本番のサーバーの代わりに、大量のパケットを作って流す</a:t>
             </a:r>
           </a:p>
         </p:txBody>
@@ -10236,7 +10107,7 @@
                 <a:ea typeface="Noto Sans JP"/>
                 <a:cs typeface="Noto Sans JP"/>
               </a:rPr>
-              <a:t>スイッチが出す「線が切れた」の通知やログを集める</a:t>
+              <a:t>スイッチが出す「回線が切れた」などの通知やログを集める</a:t>
             </a:r>
           </a:p>
           <a:p>
@@ -10268,7 +10139,7 @@
                 <a:ea typeface="Noto Sans JP"/>
                 <a:cs typeface="Noto Sans JP"/>
               </a:rPr>
-              <a:t>落ちたら気づける仕組みを作るのが PoC の本題</a:t>
+              <a:t>障害が起きたら気づける仕組みを作るのが PoC の本題</a:t>
             </a:r>
           </a:p>
         </p:txBody>
@@ -10416,7 +10287,7 @@
                 <a:ea typeface="Noto Sans JP"/>
                 <a:cs typeface="Noto Sans JP"/>
               </a:rPr>
-              <a:t>登場するのは、真ん中の spine 2 台と端の leaf 4 台と TRex 1 台</a:t>
+              <a:t>登場するのは、中央の spine 2 台、末端の leaf 4 台、TRex 1 台です</a:t>
             </a:r>
           </a:p>
         </p:txBody>
@@ -10506,7 +10377,7 @@
                 <a:ea typeface="Noto Sans JP"/>
                 <a:cs typeface="Noto Sans JP"/>
               </a:rPr>
-              <a:t>真ん中: dc1-spine-01、dc1-spine-02</a:t>
+              <a:t>中央: dc1-spine-01、dc1-spine-02</a:t>
             </a:r>
           </a:p>
           <a:p>
@@ -10538,7 +10409,7 @@
                 <a:ea typeface="Noto Sans JP"/>
                 <a:cs typeface="Noto Sans JP"/>
               </a:rPr>
-              <a:t>端（WAN 側）: dc1-s-leaf-01、dc1-s-leaf-02</a:t>
+              <a:t>末端（WAN 側）: dc1-s-leaf-01、dc1-s-leaf-02</a:t>
             </a:r>
           </a:p>
           <a:p>
@@ -10570,7 +10441,7 @@
                 <a:ea typeface="Noto Sans JP"/>
                 <a:cs typeface="Noto Sans JP"/>
               </a:rPr>
-              <a:t>端（DC 側）: dc1-a-leaf-01、dc1-a-leaf-02</a:t>
+              <a:t>末端（DC 側）: dc1-a-leaf-01、dc1-a-leaf-02</a:t>
             </a:r>
           </a:p>
           <a:p>
@@ -10602,7 +10473,7 @@
                 <a:ea typeface="Noto Sans JP"/>
                 <a:cs typeface="Noto Sans JP"/>
               </a:rPr>
-              <a:t>leaf は 2 台の spine 両方につながる（ケーブル 8 本。2 台の spine × 4 台の leaf）。leaf 同士は直接つながない</a:t>
+              <a:t>どの leaf も spine 2 台の両方につながる（ケーブル 8 本。spine 2 台 × leaf 4 台）。leaf 同士は直接つながない</a:t>
             </a:r>
           </a:p>
           <a:p>
@@ -10782,7 +10653,7 @@
                 <a:ea typeface="Noto Sans JP"/>
                 <a:cs typeface="Noto Sans JP"/>
               </a:rPr>
-              <a:t>spine は IP で運ぶだけ、leaf はスイッチとルータの両方をする</a:t>
+              <a:t>spine は IP で運ぶだけ、leaf はスイッチとルーターの両方を務めます</a:t>
             </a:r>
           </a:p>
         </p:txBody>
@@ -10858,7 +10729,7 @@
                 <a:ea typeface="Noto Sans JP"/>
                 <a:cs typeface="Noto Sans JP"/>
               </a:rPr>
-              <a:t>spine（真ん中）</a:t>
+              <a:t>spine（中央）</a:t>
             </a:r>
           </a:p>
         </p:txBody>
@@ -10913,7 +10784,7 @@
                 <a:ea typeface="Noto Sans JP"/>
                 <a:cs typeface="Noto Sans JP"/>
               </a:rPr>
-              <a:t>TRex のケーブルは挿さっていない</a:t>
+              <a:t>TRex のケーブルはつながっていない</a:t>
             </a:r>
           </a:p>
           <a:p>
@@ -10945,7 +10816,7 @@
                 <a:ea typeface="Noto Sans JP"/>
                 <a:cs typeface="Noto Sans JP"/>
               </a:rPr>
-              <a:t>leaf から来た荷物を、宛先 IP を見て別の leaf へ渡す</a:t>
+              <a:t>leaf から来たパケットを、宛先の IP アドレスを見て別の leaf へ渡す</a:t>
             </a:r>
           </a:p>
           <a:p>
@@ -10977,7 +10848,7 @@
                 <a:ea typeface="Noto Sans JP"/>
                 <a:cs typeface="Noto Sans JP"/>
               </a:rPr>
-              <a:t>あとで出てくる「誰がどこにいるか」の掲示板役もする</a:t>
+              <a:t>あとで出てくる「どの MAC アドレスがどこにいるか」の取りまとめ役も担う</a:t>
             </a:r>
           </a:p>
         </p:txBody>
@@ -11018,7 +10889,7 @@
                 <a:ea typeface="Noto Sans JP"/>
                 <a:cs typeface="Noto Sans JP"/>
               </a:rPr>
-              <a:t>leaf（端）</a:t>
+              <a:t>leaf（末端）</a:t>
             </a:r>
           </a:p>
         </p:txBody>
@@ -11032,7 +10903,7 @@
         <p:spPr>
           <a:xfrm>
             <a:off x="6347308" y="2347722"/>
-            <a:ext cx="5003140" cy="2073402"/>
+            <a:ext cx="5003140" cy="2427732"/>
           </a:xfrm>
           <a:prstGeom prst="rect">
             <a:avLst/>
@@ -11073,7 +10944,7 @@
                 <a:ea typeface="Noto Sans JP"/>
                 <a:cs typeface="Noto Sans JP"/>
               </a:rPr>
-              <a:t>TRex 側の口では MAC を見るスイッチ</a:t>
+              <a:t>TRex 側のポートでは、MAC アドレスを見るスイッチとして動く</a:t>
             </a:r>
           </a:p>
           <a:p>
@@ -11105,7 +10976,7 @@
                 <a:ea typeface="Noto Sans JP"/>
                 <a:cs typeface="Noto Sans JP"/>
               </a:rPr>
-              <a:t>spine 側の口では IP で話すルータ</a:t>
+              <a:t>spine 側のポートでは、IP で通信するルーターとして動く</a:t>
             </a:r>
           </a:p>
           <a:p>
@@ -11150,7 +11021,7 @@
         </p:nvSpPr>
         <p:spPr>
           <a:xfrm>
-            <a:off x="841248" y="4658868"/>
+            <a:off x="841248" y="5013198"/>
             <a:ext cx="10509199" cy="708660"/>
           </a:xfrm>
           <a:prstGeom prst="rect">
@@ -11178,7 +11049,7 @@
                 <a:ea typeface="Noto Sans JP"/>
                 <a:cs typeface="Noto Sans JP"/>
               </a:rPr>
-              <a:t>6 台とも同じ SR Linux で、どちらの仕事もできる。違いは機種ではなく、どこに置いて何を設定したか。</a:t>
+              <a:t>6 台とも同じ SR Linux で、どちらの動きもできます。spine と leaf の違いは機種ではなく、どこに置いてどう設定したかです。</a:t>
             </a:r>
           </a:p>
         </p:txBody>
@@ -11326,7 +11197,7 @@
                 <a:ea typeface="Noto Sans JP"/>
                 <a:cs typeface="Noto Sans JP"/>
               </a:rPr>
-              <a:t>leaf が 2 台ずつあるのは、パケットを必ず spine 経由にするため</a:t>
+              <a:t>leaf が 2 台ずつあるのは、パケットを必ず spine 経由にするためです</a:t>
             </a:r>
           </a:p>
         </p:txBody>
@@ -11416,7 +11287,7 @@
                 <a:ea typeface="Noto Sans JP"/>
                 <a:cs typeface="Noto Sans JP"/>
               </a:rPr>
-              <a:t>TRex はポートを 2 本ずつ組にして撃ち合う（port 0 ↔ 1、port 2 ↔ 3）</a:t>
+              <a:t>TRex はポートを 2 本ずつ組にして流し合う（port 0 ↔ 1、port 2 ↔ 3）</a:t>
             </a:r>
           </a:p>
           <a:p>
@@ -11448,7 +11319,7 @@
                 <a:ea typeface="Noto Sans JP"/>
                 <a:cs typeface="Noto Sans JP"/>
               </a:rPr>
-              <a:t>組の 2 本を別々の leaf に挿すので、パケットは必ず leaf → spine → leaf と本線を渡る</a:t>
+              <a:t>組の 2 本を別々の leaf につなぐので、パケットは必ず leaf → spine → leaf と本線を渡る</a:t>
             </a:r>
           </a:p>
           <a:p>
@@ -11512,7 +11383,7 @@
                 <a:ea typeface="Noto Sans JP"/>
                 <a:cs typeface="Noto Sans JP"/>
               </a:rPr>
-              <a:t>spine が 2 台なのは、片方が落ちても通る形（冗長）にするため</a:t>
+              <a:t>spine が 2 台なのは、片方が止まっても通る形（冗長）にするため</a:t>
             </a:r>
           </a:p>
           <a:p>
@@ -11544,7 +11415,7 @@
                 <a:ea typeface="Noto Sans JP"/>
                 <a:cs typeface="Noto Sans JP"/>
               </a:rPr>
-              <a:t>「線が切れた」を安全に起こして、監視を試せる</a:t>
+              <a:t>「回線が切れた」を安全に起こして、監視を試せる</a:t>
             </a:r>
           </a:p>
         </p:txBody>
@@ -11769,7 +11640,7 @@
                 <a:ea typeface="Noto Sans JP"/>
                 <a:cs typeface="Noto Sans JP"/>
               </a:rPr>
-              <a:t>ケーブルの口の名前、住所の 2 種類、LAN の中と外。</a:t>
+              <a:t>ポートの名前、アドレスの 2 種類、LAN の中と外。</a:t>
             </a:r>
           </a:p>
         </p:txBody>
@@ -11917,7 +11788,7 @@
                 <a:ea typeface="Noto Sans JP"/>
                 <a:cs typeface="Noto Sans JP"/>
               </a:rPr>
-              <a:t>ケーブルの口は、見る側によって名前が違う</a:t>
+              <a:t>言葉 1: 同じポートでも、どの立場から見るかで名前が違います</a:t>
             </a:r>
           </a:p>
         </p:txBody>
@@ -12031,7 +11902,7 @@
                           <a:ea typeface="Noto Sans JP"/>
                           <a:cs typeface="Noto Sans JP"/>
                         </a:rPr>
-                        <a:t>Linux の口</a:t>
+                        <a:t>Linux での名前</a:t>
                       </a:r>
                     </a:p>
                   </a:txBody>
@@ -12063,7 +11934,7 @@
                           <a:ea typeface="Noto Sans JP"/>
                           <a:cs typeface="Noto Sans JP"/>
                         </a:rPr>
-                        <a:t>挿してある先</a:t>
+                        <a:t>つながっている先</a:t>
                       </a:r>
                     </a:p>
                   </a:txBody>
@@ -12095,7 +11966,7 @@
                           <a:ea typeface="Noto Sans JP"/>
                           <a:cs typeface="Noto Sans JP"/>
                         </a:rPr>
-                        <a:t>この口の IP</a:t>
+                        <a:t>このポートの IP アドレス</a:t>
                       </a:r>
                     </a:p>
                   </a:txBody>
@@ -12694,7 +12565,7 @@
                 <a:ea typeface="Noto Sans JP"/>
                 <a:cs typeface="Noto Sans JP"/>
               </a:rPr>
-              <a:t>: Linux がつける名前。TRex は Linux のコンテナなので、eth0 が管理用、eth1 〜 eth4 が leaf へ挿した 4 本</a:t>
+              <a:t>: Linux が付ける名前。TRex は Linux のコンテナなので、eth0 が管理用、eth1 〜 eth4 が leaf へつないだ 4 本</a:t>
             </a:r>
           </a:p>
           <a:p>
@@ -12737,7 +12608,7 @@
                 <a:ea typeface="Noto Sans JP"/>
                 <a:cs typeface="Noto Sans JP"/>
               </a:rPr>
-              <a:t>: スイッチ（SR Linux）側の名前。1 枚目の基板の 3 番の口。1/1 と 1/2 は spine へ、1/3 は TRex へ</a:t>
+              <a:t>: スイッチ（SR Linux）側の名前。1 枚目の基板の 3 番ポート。1/1 と 1/2 は spine へ、1/3 は TRex へ</a:t>
             </a:r>
           </a:p>
           <a:p>
@@ -12928,7 +12799,7 @@
                 <a:ea typeface="Noto Sans JP"/>
                 <a:cs typeface="Noto Sans JP"/>
               </a:rPr>
-              <a:t>住所は MAC と IP の 2 種類ある</a:t>
+              <a:t>言葉 2: アドレスには、LAN の中だけで使う MAC と、LAN をまたぐ IP の 2 種類があります</a:t>
             </a:r>
           </a:p>
         </p:txBody>
@@ -13018,7 +12889,7 @@
         <p:spPr>
           <a:xfrm>
             <a:off x="841248" y="2387092"/>
-            <a:ext cx="5003140" cy="2303780"/>
+            <a:ext cx="5003140" cy="2697480"/>
           </a:xfrm>
           <a:prstGeom prst="rect">
             <a:avLst/>
@@ -13059,7 +12930,7 @@
                 <a:ea typeface="Noto Sans JP"/>
                 <a:cs typeface="Noto Sans JP"/>
               </a:rPr>
-              <a:t>ケーブルの口ごとに最初から付いている 12 桁の番号</a:t>
+              <a:t>ポートごとに最初から付いている 12 桁の番号</a:t>
             </a:r>
           </a:p>
           <a:p>
@@ -13123,7 +12994,7 @@
                 <a:ea typeface="Noto Sans JP"/>
                 <a:cs typeface="Noto Sans JP"/>
               </a:rPr>
-              <a:t>スイッチは「この MAC はどの口の先か」の表（MAC 表）で出す口を決める</a:t>
+              <a:t>スイッチは「この MAC アドレスはどのポートの先か」の表（MAC アドレステーブル）で、送り出すポートを決める</a:t>
             </a:r>
           </a:p>
         </p:txBody>
@@ -13178,7 +13049,7 @@
         <p:spPr>
           <a:xfrm>
             <a:off x="6347308" y="2387092"/>
-            <a:ext cx="5003140" cy="2697480"/>
+            <a:ext cx="5003140" cy="3091180"/>
           </a:xfrm>
           <a:prstGeom prst="rect">
             <a:avLst/>
@@ -13219,7 +13090,7 @@
                 <a:ea typeface="Noto Sans JP"/>
                 <a:cs typeface="Noto Sans JP"/>
               </a:rPr>
-              <a:t>あとから人が振る 4 つの数字</a:t>
+              <a:t>あとから人が割り当てる 4 つの数字</a:t>
             </a:r>
           </a:p>
           <a:p>
@@ -13251,7 +13122,7 @@
                 <a:ea typeface="Noto Sans JP"/>
                 <a:cs typeface="Noto Sans JP"/>
               </a:rPr>
-              <a:t>LAN をまたいで届く。ルータが宛先 IP を見て次に渡す相手を決める</a:t>
+              <a:t>LAN をまたいで届く。ルーターが宛先の IP アドレスを見て、次に渡す相手を決める</a:t>
             </a:r>
           </a:p>
           <a:p>
@@ -13283,7 +13154,7 @@
                 <a:ea typeface="Noto Sans JP"/>
                 <a:cs typeface="Noto Sans JP"/>
               </a:rPr>
-              <a:t>TRex の口は 10.100.0.11 〜 .14、スイッチ自身は 10.255.x.y</a:t>
+              <a:t>TRex のポートは 10.100.0.11 〜 .14、スイッチ本体は 10.255.x.y</a:t>
             </a:r>
           </a:p>
         </p:txBody>

--- a/docs/lab-network-architecter.pptx
+++ b/docs/lab-network-architecter.pptx
@@ -601,6 +601,11 @@
           </a:p>
           <a:p>
             <a:r>
+              <a:t>- TRex は負荷試験のときだけ、利用者とサーバーの代わりにパケットを流す（app/containerlab/gen_lab.py）。</a:t>
+            </a:r>
+          </a:p>
+          <a:p>
+            <a:r>
               <a:t>- 図は Claude のデッキ（https://claude.ai/artifact/3DtfxGFkTehxxwRpHRcB8u）の 3 枚目にある。</a:t>
             </a:r>
           </a:p>
@@ -671,12 +676,12 @@
           <a:lstStyle/>
           <a:p>
             <a:r>
-              <a:t>- TRex の組は trex/trex_cfg.yaml.in（port 0 の default_gw が port 1、port 2 の default_gw が port 3）。</a:t>
-            </a:r>
-          </a:p>
-          <a:p>
-            <a:r>
-              <a:t>- mac-vrf の ecmp は 2（spine 2 台に振り分ける）。</a:t>
+              <a:t>- a-leaf / s-leaf の a と s の意味は依頼の名前のままで、確かめていない（docs/cycles/011-lab-isis-trex-x86/design.md の未確定事項 1）。</a:t>
+            </a:r>
+          </a:p>
+          <a:p>
+            <a:r>
+              <a:t>- TRex の組は trex/trex_cfg.yaml.in（port 0 ↔ 1 が s-leaf の組、port 2 ↔ 3 が a-leaf の組）。mac-vrf の ecmp は 2。</a:t>
             </a:r>
           </a:p>
         </p:txBody>
@@ -10287,7 +10292,7 @@
                 <a:ea typeface="Noto Sans JP"/>
                 <a:cs typeface="Noto Sans JP"/>
               </a:rPr>
-              <a:t>登場するのは、中央の spine 2 台、末端の leaf 4 台、TRex 1 台です</a:t>
+              <a:t>登場するのは、中央の spine 2 台、末端の leaf 4 台、その先の利用者とサーバーです</a:t>
             </a:r>
           </a:p>
         </p:txBody>
@@ -10336,7 +10341,7 @@
         <p:spPr>
           <a:xfrm>
             <a:off x="841248" y="1755648"/>
-            <a:ext cx="10509199" cy="3314700"/>
+            <a:ext cx="10509199" cy="4102100"/>
           </a:xfrm>
           <a:prstGeom prst="rect">
             <a:avLst/>
@@ -10409,7 +10414,7 @@
                 <a:ea typeface="Noto Sans JP"/>
                 <a:cs typeface="Noto Sans JP"/>
               </a:rPr>
-              <a:t>末端（WAN 側）: dc1-s-leaf-01、dc1-s-leaf-02</a:t>
+              <a:t>末端（WAN 側）: dc1-s-leaf-01、dc1-s-leaf-02。先には利用者や外のネットワーク（WAN）がつながる</a:t>
             </a:r>
           </a:p>
           <a:p>
@@ -10441,7 +10446,7 @@
                 <a:ea typeface="Noto Sans JP"/>
                 <a:cs typeface="Noto Sans JP"/>
               </a:rPr>
-              <a:t>末端（DC 側）: dc1-a-leaf-01、dc1-a-leaf-02</a:t>
+              <a:t>末端（DC 側）: dc1-a-leaf-01、dc1-a-leaf-02。先にはサーバーがつながる</a:t>
             </a:r>
           </a:p>
           <a:p>
@@ -10473,7 +10478,7 @@
                 <a:ea typeface="Noto Sans JP"/>
                 <a:cs typeface="Noto Sans JP"/>
               </a:rPr>
-              <a:t>どの leaf も spine 2 台の両方につながる（ケーブル 8 本。spine 2 台 × leaf 4 台）。leaf 同士は直接つながない</a:t>
+              <a:t>どの leaf も spine 2 台の両方につながる（ケーブル 8 本）。leaf 同士は直接つながない</a:t>
             </a:r>
           </a:p>
           <a:p>
@@ -10505,7 +10510,7 @@
                 <a:ea typeface="Noto Sans JP"/>
                 <a:cs typeface="Noto Sans JP"/>
               </a:rPr>
-              <a:t>TRex は leaf にだけつながる（ケーブル 4 本。eth1 〜 eth4 を各 leaf に 1 本ずつ）</a:t>
+              <a:t>lab には利用者もサーバーもいないので、末端のケーブル 4 本は負荷試験用の装置 dc1-trex-01（eth1 〜 eth4）につないである</a:t>
             </a:r>
           </a:p>
         </p:txBody>
@@ -10784,7 +10789,7 @@
                 <a:ea typeface="Noto Sans JP"/>
                 <a:cs typeface="Noto Sans JP"/>
               </a:rPr>
-              <a:t>TRex のケーブルはつながっていない</a:t>
+              <a:t>末端のケーブルはつながっていない</a:t>
             </a:r>
           </a:p>
           <a:p>
@@ -10944,7 +10949,7 @@
                 <a:ea typeface="Noto Sans JP"/>
                 <a:cs typeface="Noto Sans JP"/>
               </a:rPr>
-              <a:t>TRex 側のポートでは、MAC アドレスを見るスイッチとして動く</a:t>
+              <a:t>利用者やサーバー側のポートでは、MAC アドレスを見るスイッチとして動く</a:t>
             </a:r>
           </a:p>
           <a:p>
@@ -11197,7 +11202,7 @@
                 <a:ea typeface="Noto Sans JP"/>
                 <a:cs typeface="Noto Sans JP"/>
               </a:rPr>
-              <a:t>leaf が 2 台ずつあるのは、パケットを必ず spine 経由にするためです</a:t>
+              <a:t>leaf が WAN 側と DC 側に分かれているのは、本物のデータセンターの形だからです</a:t>
             </a:r>
           </a:p>
         </p:txBody>
@@ -11246,7 +11251,7 @@
         <p:spPr>
           <a:xfrm>
             <a:off x="841248" y="1755648"/>
-            <a:ext cx="10509199" cy="3708400"/>
+            <a:ext cx="10509199" cy="3691890"/>
           </a:xfrm>
           <a:prstGeom prst="rect">
             <a:avLst/>
@@ -11264,11 +11269,11 @@
                 <a:spcPct val="155000"/>
               </a:lnSpc>
               <a:spcAft>
-                <a:spcPts val="880"/>
+                <a:spcPts val="792"/>
               </a:spcAft>
             </a:pPr>
             <a:r>
-              <a:rPr sz="2000" b="0" i="0">
+              <a:rPr sz="1800" b="0" i="0">
                 <a:solidFill>
                   <a:srgbClr val="D63A2F"/>
                 </a:solidFill>
@@ -11279,7 +11284,7 @@
               <a:t>・</a:t>
             </a:r>
             <a:r>
-              <a:rPr sz="2000" b="0" i="0">
+              <a:rPr sz="1800" b="0" i="0">
                 <a:solidFill>
                   <a:srgbClr val="1A1A1A"/>
                 </a:solidFill>
@@ -11287,7 +11292,7 @@
                 <a:ea typeface="Noto Sans JP"/>
                 <a:cs typeface="Noto Sans JP"/>
               </a:rPr>
-              <a:t>TRex はポートを 2 本ずつ組にして流し合う（port 0 ↔ 1、port 2 ↔ 3）</a:t>
+              <a:t>本物では、利用者や外のネットワークがつながる leaf（WAN 側、s-leaf）と、サーバーがつながる leaf（DC 側、a-leaf）が分かれている</a:t>
             </a:r>
           </a:p>
           <a:p>
@@ -11296,11 +11301,11 @@
                 <a:spcPct val="155000"/>
               </a:lnSpc>
               <a:spcAft>
-                <a:spcPts val="880"/>
+                <a:spcPts val="792"/>
               </a:spcAft>
             </a:pPr>
             <a:r>
-              <a:rPr sz="2000" b="0" i="0">
+              <a:rPr sz="1800" b="0" i="0">
                 <a:solidFill>
                   <a:srgbClr val="D63A2F"/>
                 </a:solidFill>
@@ -11311,7 +11316,7 @@
               <a:t>・</a:t>
             </a:r>
             <a:r>
-              <a:rPr sz="2000" b="0" i="0">
+              <a:rPr sz="1800" b="0" i="0">
                 <a:solidFill>
                   <a:srgbClr val="1A1A1A"/>
                 </a:solidFill>
@@ -11319,7 +11324,7 @@
                 <a:ea typeface="Noto Sans JP"/>
                 <a:cs typeface="Noto Sans JP"/>
               </a:rPr>
-              <a:t>組の 2 本を別々の leaf につなぐので、パケットは必ず leaf → spine → leaf と本線を渡る</a:t>
+              <a:t>この PoC は監視が本題なので、「DC 側の leaf で回線が切れた」と本物と同じ役割の名前で出せるように分けている</a:t>
             </a:r>
           </a:p>
           <a:p>
@@ -11328,11 +11333,11 @@
                 <a:spcPct val="155000"/>
               </a:lnSpc>
               <a:spcAft>
-                <a:spcPts val="880"/>
+                <a:spcPts val="792"/>
               </a:spcAft>
             </a:pPr>
             <a:r>
-              <a:rPr sz="2000" b="0" i="0">
+              <a:rPr sz="1800" b="0" i="0">
                 <a:solidFill>
                   <a:srgbClr val="D63A2F"/>
                 </a:solidFill>
@@ -11343,7 +11348,7 @@
               <a:t>・</a:t>
             </a:r>
             <a:r>
-              <a:rPr sz="2000" b="0" i="0">
+              <a:rPr sz="1800" b="0" i="0">
                 <a:solidFill>
                   <a:srgbClr val="1A1A1A"/>
                 </a:solidFill>
@@ -11351,7 +11356,7 @@
                 <a:ea typeface="Noto Sans JP"/>
                 <a:cs typeface="Noto Sans JP"/>
               </a:rPr>
-              <a:t>leaf が 1 台だけなら、同じスイッチの中で折り返して終わり。試したい部分を通らない</a:t>
+              <a:t>4 台の設定は同じ。仮に 4 台とも DC 側にしても、通信や試験は変わらない</a:t>
             </a:r>
           </a:p>
           <a:p>
@@ -11360,11 +11365,11 @@
                 <a:spcPct val="155000"/>
               </a:lnSpc>
               <a:spcAft>
-                <a:spcPts val="880"/>
+                <a:spcPts val="792"/>
               </a:spcAft>
             </a:pPr>
             <a:r>
-              <a:rPr sz="2000" b="0" i="0">
+              <a:rPr sz="1800" b="0" i="0">
                 <a:solidFill>
                   <a:srgbClr val="D63A2F"/>
                 </a:solidFill>
@@ -11375,7 +11380,7 @@
               <a:t>・</a:t>
             </a:r>
             <a:r>
-              <a:rPr sz="2000" b="0" i="0">
+              <a:rPr sz="1800" b="0" i="0">
                 <a:solidFill>
                   <a:srgbClr val="1A1A1A"/>
                 </a:solidFill>
@@ -11383,7 +11388,7 @@
                 <a:ea typeface="Noto Sans JP"/>
                 <a:cs typeface="Noto Sans JP"/>
               </a:rPr>
-              <a:t>spine が 2 台なのは、片方が止まっても通る形（冗長）にするため</a:t>
+              <a:t>それぞれ 2 台ずつあるのは、本物と同じく 1 台が止まっても通信が続く形（冗長構成）にするため。片方の回線を落として、監視が気づくかを安全に試せる</a:t>
             </a:r>
           </a:p>
           <a:p>
@@ -11392,11 +11397,11 @@
                 <a:spcPct val="155000"/>
               </a:lnSpc>
               <a:spcAft>
-                <a:spcPts val="880"/>
+                <a:spcPts val="792"/>
               </a:spcAft>
             </a:pPr>
             <a:r>
-              <a:rPr sz="2000" b="0" i="0">
+              <a:rPr sz="1800" b="0" i="0">
                 <a:solidFill>
                   <a:srgbClr val="D63A2F"/>
                 </a:solidFill>
@@ -11407,7 +11412,7 @@
               <a:t>・</a:t>
             </a:r>
             <a:r>
-              <a:rPr sz="2000" b="0" i="0">
+              <a:rPr sz="1800" b="0" i="0">
                 <a:solidFill>
                   <a:srgbClr val="1A1A1A"/>
                 </a:solidFill>
@@ -11415,7 +11420,7 @@
                 <a:ea typeface="Noto Sans JP"/>
                 <a:cs typeface="Noto Sans JP"/>
               </a:rPr>
-              <a:t>「回線が切れた」を安全に起こして、監視を試せる</a:t>
+              <a:t>組になる 2 本のケーブルを別々の leaf につなぐので、パケットは必ず leaf → spine → leaf と幹線を通り、3 つの仕組みを全部通して確かめられる</a:t>
             </a:r>
           </a:p>
         </p:txBody>
